--- a/ppt/_network_02.pptx
+++ b/ppt/_network_02.pptx
@@ -1,6 +1,6 @@
 
 <file path=ppt/presentation.xml><?xml version="1.0" encoding="utf-8"?>
-<p:presentation xmlns:a="http://schemas.openxmlformats.org/drawingml/2006/main" xmlns:r="http://schemas.openxmlformats.org/officeDocument/2006/relationships" xmlns:p="http://schemas.openxmlformats.org/presentationml/2006/main" saveSubsetFonts="1">
+<p:presentation xmlns:a="http://schemas.openxmlformats.org/drawingml/2006/main" xmlns:r="http://schemas.openxmlformats.org/officeDocument/2006/relationships" xmlns:p="http://schemas.openxmlformats.org/presentationml/2006/main" embedTrueTypeFonts="1" saveSubsetFonts="1">
   <p:sldMasterIdLst>
     <p:sldMasterId id="2147483648" r:id="rId1"/>
   </p:sldMasterIdLst>
@@ -26,6 +26,20 @@
   </p:sldIdLst>
   <p:sldSz cx="9144000" cy="6858000" type="screen4x3"/>
   <p:notesSz cx="6858000" cy="9144000"/>
+  <p:embeddedFontLst>
+    <p:embeddedFont>
+      <p:font typeface="HY견고딕" panose="02030600000101010101" pitchFamily="18" charset="-127"/>
+      <p:regular r:id="rId18"/>
+    </p:embeddedFont>
+    <p:embeddedFont>
+      <p:font typeface="가을체" panose="02030600000101010101" pitchFamily="18" charset="-127"/>
+      <p:regular r:id="rId19"/>
+    </p:embeddedFont>
+    <p:embeddedFont>
+      <p:font typeface="Wingdings 2" panose="05020102010507070707" pitchFamily="18" charset="2"/>
+      <p:regular r:id="rId20"/>
+    </p:embeddedFont>
+  </p:embeddedFontLst>
   <p:defaultTextStyle>
     <a:defPPr>
       <a:defRPr lang="ko-KR"/>
@@ -348,7 +362,7 @@
             </a:extLst>
           </p:cNvPr>
           <p:cNvSpPr>
-            <a:spLocks noRot="1" noChangeArrowheads="1" noTextEdit="1"/>
+            <a:spLocks noGrp="1" noRot="1" noChangeAspect="1" noChangeArrowheads="1" noTextEdit="1"/>
           </p:cNvSpPr>
           <p:nvPr>
             <p:ph type="sldImg" idx="2"/>
@@ -11459,7 +11473,7 @@
             </a:extLst>
           </p:cNvPr>
           <p:cNvSpPr>
-            <a:spLocks noChangeArrowheads="1"/>
+            <a:spLocks noGrp="1" noChangeArrowheads="1"/>
           </p:cNvSpPr>
           <p:nvPr>
             <p:ph type="title"/>
@@ -18801,7 +18815,7 @@
             </a:extLst>
           </p:cNvPr>
           <p:cNvSpPr>
-            <a:spLocks noChangeArrowheads="1"/>
+            <a:spLocks noGrp="1" noChangeArrowheads="1"/>
           </p:cNvSpPr>
           <p:nvPr>
             <p:ph type="title"/>
@@ -19479,7 +19493,7 @@
             </a:extLst>
           </p:cNvPr>
           <p:cNvSpPr>
-            <a:spLocks noChangeArrowheads="1"/>
+            <a:spLocks noGrp="1" noChangeArrowheads="1"/>
           </p:cNvSpPr>
           <p:nvPr>
             <p:ph type="title"/>
@@ -20032,7 +20046,7 @@
             </a:extLst>
           </p:cNvPr>
           <p:cNvSpPr>
-            <a:spLocks noChangeArrowheads="1"/>
+            <a:spLocks noGrp="1" noChangeArrowheads="1"/>
           </p:cNvSpPr>
           <p:nvPr>
             <p:ph type="title"/>
@@ -20739,66 +20753,78 @@
           <a:p>
             <a:pPr eaLnBrk="1" hangingPunct="1"/>
             <a:r>
-              <a:rPr lang="ko-KR" altLang="en-US"/>
+              <a:rPr lang="ko-KR" altLang="en-US" dirty="0"/>
               <a:t>소켓 모드</a:t>
             </a:r>
             <a:r>
-              <a:rPr lang="en-US" altLang="ko-KR"/>
+              <a:rPr lang="en-US" altLang="ko-KR" dirty="0"/>
               <a:t>(socket mode)</a:t>
             </a:r>
           </a:p>
           <a:p>
             <a:pPr lvl="1" eaLnBrk="1" hangingPunct="1"/>
             <a:r>
-              <a:rPr lang="ko-KR" altLang="en-US"/>
-              <a:t>소켓 함수 호출시 동작 방식에 따라 블로킹</a:t>
+              <a:rPr lang="ko-KR" altLang="en-US" dirty="0"/>
+              <a:t>소켓 함수 호출 시 동작 방식에 따라 블로킹</a:t>
             </a:r>
             <a:r>
-              <a:rPr lang="en-US" altLang="ko-KR"/>
+              <a:rPr lang="en-US" altLang="ko-KR" dirty="0"/>
               <a:t>(blocking)</a:t>
             </a:r>
             <a:r>
-              <a:rPr lang="ko-KR" altLang="en-US"/>
-              <a:t>과 넌블로킹</a:t>
+              <a:rPr lang="ko-KR" altLang="en-US" dirty="0"/>
+              <a:t>과 </a:t>
             </a:r>
             <a:r>
-              <a:rPr lang="en-US" altLang="ko-KR"/>
+              <a:rPr lang="ko-KR" altLang="en-US" dirty="0" err="1"/>
+              <a:t>넌블로킹</a:t>
+            </a:r>
+            <a:r>
+              <a:rPr lang="en-US" altLang="ko-KR" dirty="0"/>
               <a:t>(nonblocking) </a:t>
             </a:r>
             <a:r>
-              <a:rPr lang="ko-KR" altLang="en-US"/>
+              <a:rPr lang="ko-KR" altLang="en-US" dirty="0"/>
               <a:t>소켓으로 구분</a:t>
             </a:r>
           </a:p>
           <a:p>
             <a:pPr lvl="1" eaLnBrk="1" hangingPunct="1"/>
-            <a:endParaRPr lang="ko-KR" altLang="en-US"/>
+            <a:endParaRPr lang="ko-KR" altLang="en-US" dirty="0"/>
           </a:p>
           <a:p>
             <a:pPr eaLnBrk="1" hangingPunct="1"/>
             <a:r>
-              <a:rPr lang="ko-KR" altLang="en-US"/>
+              <a:rPr lang="ko-KR" altLang="en-US" dirty="0"/>
               <a:t>블로킹 소켓</a:t>
             </a:r>
           </a:p>
           <a:p>
             <a:pPr lvl="1" eaLnBrk="1" hangingPunct="1"/>
             <a:r>
-              <a:rPr lang="ko-KR" altLang="en-US"/>
-              <a:t>소켓 함수 호출 시 조건이 만족되지 않으면 함수는 리턴하지 않고 해당 스레드는 대기 상태</a:t>
+              <a:rPr lang="ko-KR" altLang="en-US" dirty="0"/>
+              <a:t>소켓 함수 호출 시 조건이 만족되지 않으면 함수는 </a:t>
             </a:r>
             <a:r>
-              <a:rPr lang="en-US" altLang="ko-KR"/>
+              <a:rPr lang="ko-KR" altLang="en-US" dirty="0" err="1"/>
+              <a:t>리턴하지</a:t>
+            </a:r>
+            <a:r>
+              <a:rPr lang="ko-KR" altLang="en-US" dirty="0"/>
+              <a:t> 않고 해당 스레드는 대기 상태</a:t>
+            </a:r>
+            <a:r>
+              <a:rPr lang="en-US" altLang="ko-KR" dirty="0"/>
               <a:t>(wait state)</a:t>
             </a:r>
             <a:r>
-              <a:rPr lang="ko-KR" altLang="en-US"/>
+              <a:rPr lang="ko-KR" altLang="en-US" dirty="0"/>
               <a:t>가 됨</a:t>
             </a:r>
           </a:p>
           <a:p>
             <a:pPr eaLnBrk="1" hangingPunct="1"/>
-            <a:endParaRPr lang="en-US" altLang="ko-KR"/>
+            <a:endParaRPr lang="en-US" altLang="ko-KR" dirty="0"/>
           </a:p>
         </p:txBody>
       </p:sp>
